--- a/ゲーム科1年/00_前期/ゲームプログラミングⅠ/15_矩形と矩形の当たり判定_課題.pptx
+++ b/ゲーム科1年/00_前期/ゲームプログラミングⅠ/15_矩形と矩形の当たり判定_課題.pptx
@@ -265,7 +265,7 @@
           <a:p>
             <a:fld id="{E9CC885B-4903-4D54-9A93-00025F12DED9}" type="datetimeFigureOut">
               <a:rPr kumimoji="1" lang="ja-JP" altLang="en-US" smtClean="0"/>
-              <a:t>2024/9/30</a:t>
+              <a:t>2026/6/22</a:t>
             </a:fld>
             <a:endParaRPr kumimoji="1" lang="ja-JP" altLang="en-US"/>
           </a:p>
@@ -495,7 +495,7 @@
           <a:p>
             <a:fld id="{E9CC885B-4903-4D54-9A93-00025F12DED9}" type="datetimeFigureOut">
               <a:rPr kumimoji="1" lang="ja-JP" altLang="en-US" smtClean="0"/>
-              <a:t>2024/9/30</a:t>
+              <a:t>2026/6/22</a:t>
             </a:fld>
             <a:endParaRPr kumimoji="1" lang="ja-JP" altLang="en-US"/>
           </a:p>
@@ -735,7 +735,7 @@
           <a:p>
             <a:fld id="{E9CC885B-4903-4D54-9A93-00025F12DED9}" type="datetimeFigureOut">
               <a:rPr kumimoji="1" lang="ja-JP" altLang="en-US" smtClean="0"/>
-              <a:t>2024/9/30</a:t>
+              <a:t>2026/6/22</a:t>
             </a:fld>
             <a:endParaRPr kumimoji="1" lang="ja-JP" altLang="en-US"/>
           </a:p>
@@ -965,7 +965,7 @@
           <a:p>
             <a:fld id="{E9CC885B-4903-4D54-9A93-00025F12DED9}" type="datetimeFigureOut">
               <a:rPr kumimoji="1" lang="ja-JP" altLang="en-US" smtClean="0"/>
-              <a:t>2024/9/30</a:t>
+              <a:t>2026/6/22</a:t>
             </a:fld>
             <a:endParaRPr kumimoji="1" lang="ja-JP" altLang="en-US"/>
           </a:p>
@@ -1240,7 +1240,7 @@
           <a:p>
             <a:fld id="{E9CC885B-4903-4D54-9A93-00025F12DED9}" type="datetimeFigureOut">
               <a:rPr kumimoji="1" lang="ja-JP" altLang="en-US" smtClean="0"/>
-              <a:t>2024/9/30</a:t>
+              <a:t>2026/6/22</a:t>
             </a:fld>
             <a:endParaRPr kumimoji="1" lang="ja-JP" altLang="en-US"/>
           </a:p>
@@ -1569,7 +1569,7 @@
           <a:p>
             <a:fld id="{E9CC885B-4903-4D54-9A93-00025F12DED9}" type="datetimeFigureOut">
               <a:rPr kumimoji="1" lang="ja-JP" altLang="en-US" smtClean="0"/>
-              <a:t>2024/9/30</a:t>
+              <a:t>2026/6/22</a:t>
             </a:fld>
             <a:endParaRPr kumimoji="1" lang="ja-JP" altLang="en-US"/>
           </a:p>
@@ -2045,7 +2045,7 @@
           <a:p>
             <a:fld id="{E9CC885B-4903-4D54-9A93-00025F12DED9}" type="datetimeFigureOut">
               <a:rPr kumimoji="1" lang="ja-JP" altLang="en-US" smtClean="0"/>
-              <a:t>2024/9/30</a:t>
+              <a:t>2026/6/22</a:t>
             </a:fld>
             <a:endParaRPr kumimoji="1" lang="ja-JP" altLang="en-US"/>
           </a:p>
@@ -2186,7 +2186,7 @@
           <a:p>
             <a:fld id="{E9CC885B-4903-4D54-9A93-00025F12DED9}" type="datetimeFigureOut">
               <a:rPr kumimoji="1" lang="ja-JP" altLang="en-US" smtClean="0"/>
-              <a:t>2024/9/30</a:t>
+              <a:t>2026/6/22</a:t>
             </a:fld>
             <a:endParaRPr kumimoji="1" lang="ja-JP" altLang="en-US"/>
           </a:p>
@@ -2299,7 +2299,7 @@
           <a:p>
             <a:fld id="{E9CC885B-4903-4D54-9A93-00025F12DED9}" type="datetimeFigureOut">
               <a:rPr kumimoji="1" lang="ja-JP" altLang="en-US" smtClean="0"/>
-              <a:t>2024/9/30</a:t>
+              <a:t>2026/6/22</a:t>
             </a:fld>
             <a:endParaRPr kumimoji="1" lang="ja-JP" altLang="en-US"/>
           </a:p>
@@ -2642,7 +2642,7 @@
           <a:p>
             <a:fld id="{E9CC885B-4903-4D54-9A93-00025F12DED9}" type="datetimeFigureOut">
               <a:rPr kumimoji="1" lang="ja-JP" altLang="en-US" smtClean="0"/>
-              <a:t>2024/9/30</a:t>
+              <a:t>2026/6/22</a:t>
             </a:fld>
             <a:endParaRPr kumimoji="1" lang="ja-JP" altLang="en-US"/>
           </a:p>
@@ -2930,7 +2930,7 @@
           <a:p>
             <a:fld id="{E9CC885B-4903-4D54-9A93-00025F12DED9}" type="datetimeFigureOut">
               <a:rPr kumimoji="1" lang="ja-JP" altLang="en-US" smtClean="0"/>
-              <a:t>2024/9/30</a:t>
+              <a:t>2026/6/22</a:t>
             </a:fld>
             <a:endParaRPr kumimoji="1" lang="ja-JP" altLang="en-US"/>
           </a:p>
@@ -3203,7 +3203,7 @@
           <a:p>
             <a:fld id="{E9CC885B-4903-4D54-9A93-00025F12DED9}" type="datetimeFigureOut">
               <a:rPr kumimoji="1" lang="ja-JP" altLang="en-US" smtClean="0"/>
-              <a:t>2024/9/30</a:t>
+              <a:t>2026/6/22</a:t>
             </a:fld>
             <a:endParaRPr kumimoji="1" lang="ja-JP" altLang="en-US"/>
           </a:p>
@@ -4961,7 +4961,7 @@
         <p:spPr>
           <a:xfrm>
             <a:off x="567542" y="1216429"/>
-            <a:ext cx="8905002" cy="5016758"/>
+            <a:ext cx="8648521" cy="3170099"/>
           </a:xfrm>
           <a:prstGeom prst="rect">
             <a:avLst/>
@@ -4984,108 +4984,74 @@
                   <a:srgbClr val="FF0000"/>
                 </a:solidFill>
               </a:rPr>
-              <a:t>当たった時の処理</a:t>
-            </a:r>
+              <a:t>移動と当たり判定を複合する必要があります。</a:t>
+            </a:r>
+            <a:endParaRPr kumimoji="1" lang="en-US" altLang="ja-JP" sz="2000" b="1" dirty="0">
+              <a:solidFill>
+                <a:srgbClr val="FF0000"/>
+              </a:solidFill>
+            </a:endParaRPr>
+          </a:p>
+          <a:p>
+            <a:r>
+              <a:rPr lang="ja-JP" altLang="en-US" sz="2000" dirty="0"/>
+              <a:t>以下は処理順です。</a:t>
+            </a:r>
+            <a:endParaRPr lang="en-US" altLang="ja-JP" sz="2000" dirty="0"/>
+          </a:p>
+          <a:p>
+            <a:endParaRPr lang="en-US" altLang="ja-JP" sz="2000" dirty="0"/>
+          </a:p>
+          <a:p>
             <a:r>
               <a:rPr kumimoji="1" lang="ja-JP" altLang="en-US" sz="2000" dirty="0"/>
-              <a:t>で以下の</a:t>
-            </a:r>
+              <a:t>１．</a:t>
+            </a:r>
+            <a:r>
+              <a:rPr kumimoji="1" lang="en-US" altLang="ja-JP" sz="2000" dirty="0"/>
+              <a:t>X</a:t>
+            </a:r>
+            <a:r>
+              <a:rPr kumimoji="1" lang="ja-JP" altLang="en-US" sz="2000" dirty="0"/>
+              <a:t>軸だけ移動する</a:t>
+            </a:r>
+            <a:endParaRPr lang="en-US" altLang="ja-JP" sz="2000" dirty="0"/>
+          </a:p>
+          <a:p>
+            <a:endParaRPr kumimoji="1" lang="en-US" altLang="ja-JP" sz="2000" dirty="0"/>
+          </a:p>
+          <a:p>
             <a:r>
               <a:rPr lang="ja-JP" altLang="en-US" sz="2000" dirty="0"/>
-              <a:t>手順で処理します。</a:t>
-            </a:r>
+              <a:t>２．当たり判定をして、めり込んだ分だけ押し出す</a:t>
+            </a:r>
+            <a:endParaRPr lang="en-US" altLang="ja-JP" sz="2000" dirty="0"/>
+          </a:p>
+          <a:p>
             <a:endParaRPr kumimoji="1" lang="en-US" altLang="ja-JP" sz="2000" dirty="0"/>
           </a:p>
           <a:p>
             <a:r>
-              <a:rPr kumimoji="1" lang="ja-JP" altLang="en-US" sz="2000" dirty="0"/>
-              <a:t>余裕があれば挑戦</a:t>
-            </a:r>
-            <a:r>
-              <a:rPr kumimoji="1" lang="ja-JP" altLang="en-US" sz="2000"/>
-              <a:t>してみましょう。</a:t>
-            </a:r>
+              <a:rPr lang="ja-JP" altLang="en-US" sz="2000" dirty="0"/>
+              <a:t>３．</a:t>
+            </a:r>
+            <a:r>
+              <a:rPr lang="en-US" altLang="ja-JP" sz="2000" dirty="0"/>
+              <a:t>Y</a:t>
+            </a:r>
+            <a:r>
+              <a:rPr lang="ja-JP" altLang="en-US" sz="2000" dirty="0"/>
+              <a:t>軸だけ移動する</a:t>
+            </a:r>
+            <a:endParaRPr lang="en-US" altLang="ja-JP" sz="2000" dirty="0"/>
+          </a:p>
+          <a:p>
             <a:endParaRPr kumimoji="1" lang="en-US" altLang="ja-JP" sz="2000" dirty="0"/>
           </a:p>
           <a:p>
-            <a:endParaRPr lang="en-US" altLang="ja-JP" sz="2000" dirty="0"/>
-          </a:p>
-          <a:p>
-            <a:r>
-              <a:rPr kumimoji="1" lang="ja-JP" altLang="en-US" sz="2000" dirty="0"/>
-              <a:t>１．横にだけ移動したときに当たっているかどうかを判定する</a:t>
-            </a:r>
-            <a:endParaRPr kumimoji="1" lang="en-US" altLang="ja-JP" sz="2000" dirty="0"/>
-          </a:p>
-          <a:p>
             <a:r>
               <a:rPr lang="ja-JP" altLang="en-US" sz="2000" dirty="0"/>
-              <a:t>　　判定するときはエネミー側の矩形を少しだけ小さめにして判定する。</a:t>
-            </a:r>
-            <a:endParaRPr lang="en-US" altLang="ja-JP" sz="2000" dirty="0"/>
-          </a:p>
-          <a:p>
-            <a:endParaRPr kumimoji="1" lang="en-US" altLang="ja-JP" sz="2000" dirty="0"/>
-          </a:p>
-          <a:p>
-            <a:r>
-              <a:rPr lang="ja-JP" altLang="en-US" sz="2000" dirty="0"/>
-              <a:t>２．１で当たっていたら横に押しだす。</a:t>
-            </a:r>
-            <a:endParaRPr lang="en-US" altLang="ja-JP" sz="2000" dirty="0"/>
-          </a:p>
-          <a:p>
-            <a:r>
-              <a:rPr lang="ja-JP" altLang="en-US" sz="2000" dirty="0"/>
-              <a:t>　　押し出し後の座標はローカル変数に保存しておく</a:t>
-            </a:r>
-            <a:endParaRPr lang="en-US" altLang="ja-JP" sz="2000" dirty="0"/>
-          </a:p>
-          <a:p>
-            <a:endParaRPr kumimoji="1" lang="en-US" altLang="ja-JP" sz="2000" dirty="0"/>
-          </a:p>
-          <a:p>
-            <a:r>
-              <a:rPr lang="ja-JP" altLang="en-US" sz="2000" dirty="0"/>
-              <a:t>３．縦にだけ移動したときに当たっているかどうかを判定する</a:t>
-            </a:r>
-            <a:endParaRPr lang="en-US" altLang="ja-JP" sz="2000" dirty="0"/>
-          </a:p>
-          <a:p>
-            <a:r>
-              <a:rPr lang="ja-JP" altLang="en-US" sz="2000" dirty="0"/>
-              <a:t>　　判定するときはエネミー側の矩形を少しだけ小さめにして判定する。</a:t>
-            </a:r>
-            <a:endParaRPr lang="en-US" altLang="ja-JP" sz="2000" dirty="0"/>
-          </a:p>
-          <a:p>
-            <a:endParaRPr kumimoji="1" lang="en-US" altLang="ja-JP" sz="2000" dirty="0"/>
-          </a:p>
-          <a:p>
-            <a:r>
-              <a:rPr lang="ja-JP" altLang="en-US" sz="2000" dirty="0"/>
-              <a:t>４．３で当たっていたら縦に押し出す。</a:t>
-            </a:r>
-            <a:endParaRPr lang="en-US" altLang="ja-JP" sz="2000" dirty="0"/>
-          </a:p>
-          <a:p>
-            <a:r>
-              <a:rPr kumimoji="1" lang="ja-JP" altLang="en-US" sz="2000" dirty="0"/>
-              <a:t>　　押し出し後の座標はローカル変数に保存しておく</a:t>
-            </a:r>
-            <a:endParaRPr kumimoji="1" lang="en-US" altLang="ja-JP" sz="2000" dirty="0"/>
-          </a:p>
-          <a:p>
-            <a:endParaRPr lang="en-US" altLang="ja-JP" sz="2000" dirty="0"/>
-          </a:p>
-          <a:p>
-            <a:r>
-              <a:rPr kumimoji="1" lang="ja-JP" altLang="en-US" sz="2000" dirty="0"/>
-              <a:t>５．ローカル変数に保存してしてある座標を</a:t>
-            </a:r>
-            <a:r>
-              <a:rPr lang="ja-JP" altLang="en-US" sz="2000" dirty="0"/>
-              <a:t>プレイヤーの座標に反映する。</a:t>
+              <a:t>４．当たり判定をして、めり込んだ分だけ押し出す</a:t>
             </a:r>
             <a:endParaRPr kumimoji="1" lang="en-US" altLang="ja-JP" sz="2000" dirty="0"/>
           </a:p>
